--- a/2 am/1 الجداول/cours 5/عرض الدرس.pptx
+++ b/2 am/1 الجداول/cours 5/عرض الدرس.pptx
@@ -5660,15 +5660,15 @@
           </a:bodyPr>
           <a:lstStyle/>
           <a:p>
-            <a:pPr marL="736600" indent="-571500" algn="r" rtl="1">
+            <a:pPr marL="908050" indent="-742950" algn="r" rtl="1">
               <a:lnSpc>
                 <a:spcPct val="115000"/>
               </a:lnSpc>
               <a:spcAft>
                 <a:spcPts val="1000"/>
               </a:spcAft>
-              <a:buFont typeface="Wingdings" panose="05000000000000000000" pitchFamily="2" charset="2"/>
-              <a:buChar char="§"/>
+              <a:buFont typeface="+mj-lt"/>
+              <a:buAutoNum type="arabicPeriod"/>
             </a:pPr>
             <a:r>
               <a:rPr lang="ar-DZ" sz="3600" b="1" dirty="0" smtClean="0">
@@ -5680,15 +5680,15 @@
             </a:r>
           </a:p>
           <a:p>
-            <a:pPr marL="736600" indent="-571500" algn="r" rtl="1">
+            <a:pPr marL="908050" indent="-742950" algn="r" rtl="1">
               <a:lnSpc>
                 <a:spcPct val="115000"/>
               </a:lnSpc>
               <a:spcAft>
                 <a:spcPts val="1000"/>
               </a:spcAft>
-              <a:buFont typeface="Wingdings" panose="05000000000000000000" pitchFamily="2" charset="2"/>
-              <a:buChar char="§"/>
+              <a:buFont typeface="+mj-lt"/>
+              <a:buAutoNum type="arabicPeriod"/>
             </a:pPr>
             <a:r>
               <a:rPr lang="ar-DZ" sz="3600" b="1" dirty="0" smtClean="0">
@@ -5713,15 +5713,15 @@
             </a:endParaRPr>
           </a:p>
           <a:p>
-            <a:pPr marL="736600" indent="-571500" algn="r" rtl="1">
+            <a:pPr marL="908050" indent="-742950" algn="r" rtl="1">
               <a:lnSpc>
                 <a:spcPct val="115000"/>
               </a:lnSpc>
               <a:spcAft>
                 <a:spcPts val="1000"/>
               </a:spcAft>
-              <a:buFont typeface="Wingdings" panose="05000000000000000000" pitchFamily="2" charset="2"/>
-              <a:buChar char="§"/>
+              <a:buFont typeface="+mj-lt"/>
+              <a:buAutoNum type="arabicPeriod"/>
             </a:pPr>
             <a:r>
               <a:rPr lang="ar-DZ" sz="3600" b="1" dirty="0" smtClean="0">
@@ -5746,15 +5746,15 @@
             </a:endParaRPr>
           </a:p>
           <a:p>
-            <a:pPr marL="736600" indent="-571500" algn="r" rtl="1">
+            <a:pPr marL="908050" indent="-742950" algn="r" rtl="1">
               <a:lnSpc>
                 <a:spcPct val="115000"/>
               </a:lnSpc>
               <a:spcAft>
                 <a:spcPts val="1000"/>
               </a:spcAft>
-              <a:buFont typeface="Wingdings" panose="05000000000000000000" pitchFamily="2" charset="2"/>
-              <a:buChar char="§"/>
+              <a:buFont typeface="+mj-lt"/>
+              <a:buAutoNum type="arabicPeriod"/>
             </a:pPr>
             <a:r>
               <a:rPr lang="ar-DZ" sz="3600" b="1" dirty="0">
@@ -5782,15 +5782,15 @@
             </a:r>
           </a:p>
           <a:p>
-            <a:pPr marL="736600" indent="-571500" algn="r" rtl="1">
+            <a:pPr marL="908050" indent="-742950" algn="r" rtl="1">
               <a:lnSpc>
                 <a:spcPct val="115000"/>
               </a:lnSpc>
               <a:spcAft>
                 <a:spcPts val="1000"/>
               </a:spcAft>
-              <a:buFont typeface="Wingdings" panose="05000000000000000000" pitchFamily="2" charset="2"/>
-              <a:buChar char="§"/>
+              <a:buFont typeface="+mj-lt"/>
+              <a:buAutoNum type="arabicPeriod"/>
             </a:pPr>
             <a:r>
               <a:rPr lang="ar-DZ" sz="3600" b="1" dirty="0" smtClean="0">
@@ -5863,15 +5863,15 @@
             </a:endParaRPr>
           </a:p>
           <a:p>
-            <a:pPr marL="736600" indent="-571500" algn="r" rtl="1">
+            <a:pPr marL="908050" indent="-742950" algn="r" rtl="1">
               <a:lnSpc>
                 <a:spcPct val="115000"/>
               </a:lnSpc>
               <a:spcAft>
                 <a:spcPts val="1000"/>
               </a:spcAft>
-              <a:buFont typeface="Wingdings" panose="05000000000000000000" pitchFamily="2" charset="2"/>
-              <a:buChar char="§"/>
+              <a:buFont typeface="+mj-lt"/>
+              <a:buAutoNum type="arabicPeriod"/>
             </a:pPr>
             <a:r>
               <a:rPr lang="ar-DZ" sz="3600" b="1" dirty="0">
@@ -6015,8 +6015,8 @@
         </p:nvSpPr>
         <p:spPr>
           <a:xfrm>
-            <a:off x="9495" y="4142401"/>
-            <a:ext cx="11868150" cy="1451679"/>
+            <a:off x="9496" y="3989277"/>
+            <a:ext cx="11868150" cy="2759730"/>
           </a:xfrm>
           <a:prstGeom prst="rect">
             <a:avLst/>
@@ -6028,51 +6028,130 @@
           </a:bodyPr>
           <a:lstStyle/>
           <a:p>
-            <a:pPr algn="r" rtl="1">
+            <a:pPr marL="571500" indent="-571500" algn="r" rtl="1">
               <a:spcAft>
                 <a:spcPts val="1000"/>
               </a:spcAft>
+              <a:buFont typeface="Wingdings" panose="05000000000000000000" pitchFamily="2" charset="2"/>
+              <a:buChar char="§"/>
             </a:pPr>
             <a:r>
-              <a:rPr lang="ar-DZ" sz="4000" dirty="0" smtClean="0">
+              <a:rPr lang="ar-DZ" sz="2800" b="1" dirty="0" smtClean="0">
                 <a:latin typeface="Calibri" panose="020F0502020204030204" pitchFamily="34" charset="0"/>
                 <a:ea typeface="Times New Roman" panose="02020603050405020304" pitchFamily="18" charset="0"/>
                 <a:cs typeface="Times New Roman" panose="02020603050405020304" pitchFamily="18" charset="0"/>
               </a:rPr>
-              <a:t>- ما </a:t>
-            </a:r>
-            <a:r>
-              <a:rPr lang="ar-DZ" sz="4000" dirty="0">
+              <a:t>نلاحظ </a:t>
+            </a:r>
+            <a:r>
+              <a:rPr lang="ar-DZ" sz="2800" b="1" dirty="0">
                 <a:latin typeface="Calibri" panose="020F0502020204030204" pitchFamily="34" charset="0"/>
                 <a:ea typeface="Times New Roman" panose="02020603050405020304" pitchFamily="18" charset="0"/>
                 <a:cs typeface="Times New Roman" panose="02020603050405020304" pitchFamily="18" charset="0"/>
               </a:rPr>
-              <a:t>الذي حصل للخلية الأولى في السطر الأخير حتي أصبحت خليتين ؟</a:t>
-            </a:r>
-          </a:p>
-          <a:p>
-            <a:pPr algn="r" rtl="1">
+              <a:t>الآن أننا قد تحصلنا على الجدول 2.</a:t>
+            </a:r>
+          </a:p>
+          <a:p>
+            <a:pPr marL="571500" indent="-571500" algn="r" rtl="1">
               <a:spcAft>
                 <a:spcPts val="1000"/>
               </a:spcAft>
+              <a:buFont typeface="Wingdings" panose="05000000000000000000" pitchFamily="2" charset="2"/>
+              <a:buChar char="§"/>
             </a:pPr>
             <a:r>
-              <a:rPr lang="ar-DZ" sz="4000" dirty="0" smtClean="0">
+              <a:rPr lang="ar-DZ" sz="2800" b="1" dirty="0" smtClean="0">
                 <a:latin typeface="Calibri" panose="020F0502020204030204" pitchFamily="34" charset="0"/>
                 <a:ea typeface="Times New Roman" panose="02020603050405020304" pitchFamily="18" charset="0"/>
                 <a:cs typeface="Times New Roman" panose="02020603050405020304" pitchFamily="18" charset="0"/>
               </a:rPr>
-              <a:t>- جد </a:t>
-            </a:r>
-            <a:r>
-              <a:rPr lang="ar-DZ" sz="4000" dirty="0">
+              <a:t>انطلاقا </a:t>
+            </a:r>
+            <a:r>
+              <a:rPr lang="ar-DZ" sz="2800" b="1" dirty="0">
                 <a:latin typeface="Calibri" panose="020F0502020204030204" pitchFamily="34" charset="0"/>
                 <a:ea typeface="Times New Roman" panose="02020603050405020304" pitchFamily="18" charset="0"/>
                 <a:cs typeface="Times New Roman" panose="02020603050405020304" pitchFamily="18" charset="0"/>
               </a:rPr>
-              <a:t>طريقة تسمح بتقسيم الخلية الأولى في السطر الأخير إلى خليتين.</a:t>
-            </a:r>
-            <a:endParaRPr lang="fr-FR" sz="4000" dirty="0">
+              <a:t>من هذا الجدول نريد الحصول على الجدول 3.</a:t>
+            </a:r>
+          </a:p>
+          <a:p>
+            <a:pPr marL="571500" indent="-571500" algn="r" rtl="1">
+              <a:spcAft>
+                <a:spcPts val="1000"/>
+              </a:spcAft>
+              <a:buFont typeface="Wingdings" panose="05000000000000000000" pitchFamily="2" charset="2"/>
+              <a:buChar char="§"/>
+            </a:pPr>
+            <a:r>
+              <a:rPr lang="ar-DZ" sz="2800" b="1" dirty="0" smtClean="0">
+                <a:latin typeface="Calibri" panose="020F0502020204030204" pitchFamily="34" charset="0"/>
+                <a:ea typeface="Times New Roman" panose="02020603050405020304" pitchFamily="18" charset="0"/>
+                <a:cs typeface="Times New Roman" panose="02020603050405020304" pitchFamily="18" charset="0"/>
+              </a:rPr>
+              <a:t>لنبحث </a:t>
+            </a:r>
+            <a:r>
+              <a:rPr lang="ar-DZ" sz="2800" b="1" dirty="0">
+                <a:latin typeface="Calibri" panose="020F0502020204030204" pitchFamily="34" charset="0"/>
+                <a:ea typeface="Times New Roman" panose="02020603050405020304" pitchFamily="18" charset="0"/>
+                <a:cs typeface="Times New Roman" panose="02020603050405020304" pitchFamily="18" charset="0"/>
+              </a:rPr>
+              <a:t>بتمعن عن الأداة اللازمة لتلوين خلية "المعلوماتية"</a:t>
+            </a:r>
+          </a:p>
+          <a:p>
+            <a:pPr marL="571500" indent="-571500" algn="r" rtl="1">
+              <a:spcAft>
+                <a:spcPts val="1000"/>
+              </a:spcAft>
+              <a:buFont typeface="Wingdings" panose="05000000000000000000" pitchFamily="2" charset="2"/>
+              <a:buChar char="§"/>
+            </a:pPr>
+            <a:r>
+              <a:rPr lang="ar-DZ" sz="2800" b="1" dirty="0" smtClean="0">
+                <a:latin typeface="Calibri" panose="020F0502020204030204" pitchFamily="34" charset="0"/>
+                <a:ea typeface="Times New Roman" panose="02020603050405020304" pitchFamily="18" charset="0"/>
+                <a:cs typeface="Times New Roman" panose="02020603050405020304" pitchFamily="18" charset="0"/>
+              </a:rPr>
+              <a:t>نحاول </a:t>
+            </a:r>
+            <a:r>
+              <a:rPr lang="ar-DZ" sz="2800" b="1" dirty="0">
+                <a:latin typeface="Calibri" panose="020F0502020204030204" pitchFamily="34" charset="0"/>
+                <a:ea typeface="Times New Roman" panose="02020603050405020304" pitchFamily="18" charset="0"/>
+                <a:cs typeface="Times New Roman" panose="02020603050405020304" pitchFamily="18" charset="0"/>
+              </a:rPr>
+              <a:t>تلوين الخلايا الأخرى للحصول على الجدول 3.</a:t>
+            </a:r>
+          </a:p>
+          <a:p>
+            <a:pPr marL="571500" indent="-571500" algn="r" rtl="1">
+              <a:spcAft>
+                <a:spcPts val="1000"/>
+              </a:spcAft>
+              <a:buFont typeface="Wingdings" panose="05000000000000000000" pitchFamily="2" charset="2"/>
+              <a:buChar char="§"/>
+            </a:pPr>
+            <a:r>
+              <a:rPr lang="ar-DZ" sz="2800" b="1" dirty="0" smtClean="0">
+                <a:latin typeface="Calibri" panose="020F0502020204030204" pitchFamily="34" charset="0"/>
+                <a:ea typeface="Times New Roman" panose="02020603050405020304" pitchFamily="18" charset="0"/>
+                <a:cs typeface="Times New Roman" panose="02020603050405020304" pitchFamily="18" charset="0"/>
+              </a:rPr>
+              <a:t>ما </a:t>
+            </a:r>
+            <a:r>
+              <a:rPr lang="ar-DZ" sz="2800" b="1" dirty="0">
+                <a:latin typeface="Calibri" panose="020F0502020204030204" pitchFamily="34" charset="0"/>
+                <a:ea typeface="Times New Roman" panose="02020603050405020304" pitchFamily="18" charset="0"/>
+                <a:cs typeface="Times New Roman" panose="02020603050405020304" pitchFamily="18" charset="0"/>
+              </a:rPr>
+              <a:t>هي إذن مراحل التظليل ؟</a:t>
+            </a:r>
+            <a:endParaRPr lang="fr-FR" sz="2800" b="1" dirty="0">
               <a:latin typeface="Calibri" panose="020F0502020204030204" pitchFamily="34" charset="0"/>
               <a:ea typeface="Times New Roman" panose="02020603050405020304" pitchFamily="18" charset="0"/>
               <a:cs typeface="Arial" panose="020B0604020202020204" pitchFamily="34" charset="0"/>
@@ -6082,28 +6161,42 @@
       </p:sp>
       <p:pic>
         <p:nvPicPr>
-          <p:cNvPr id="5" name="Image 4"/>
-          <p:cNvPicPr>
-            <a:picLocks noChangeAspect="1"/>
-          </p:cNvPicPr>
+          <p:cNvPr id="6" name="Image 5"/>
+          <p:cNvPicPr/>
           <p:nvPr/>
         </p:nvPicPr>
         <p:blipFill>
-          <a:blip r:embed="rId3">
-            <a:extLst>
-              <a:ext uri="{28A0092B-C50C-407E-A947-70E740481C1C}">
-                <a14:useLocalDpi xmlns:a14="http://schemas.microsoft.com/office/drawing/2010/main" val="0"/>
-              </a:ext>
-            </a:extLst>
-          </a:blip>
+          <a:blip r:embed="rId3"/>
           <a:stretch>
             <a:fillRect/>
           </a:stretch>
         </p:blipFill>
         <p:spPr>
           <a:xfrm>
-            <a:off x="575565" y="1256040"/>
-            <a:ext cx="11302080" cy="2178855"/>
+            <a:off x="6268652" y="856135"/>
+            <a:ext cx="4518617" cy="2814716"/>
+          </a:xfrm>
+          <a:prstGeom prst="rect">
+            <a:avLst/>
+          </a:prstGeom>
+        </p:spPr>
+      </p:pic>
+      <p:pic>
+        <p:nvPicPr>
+          <p:cNvPr id="7" name="Image 6"/>
+          <p:cNvPicPr/>
+          <p:nvPr/>
+        </p:nvPicPr>
+        <p:blipFill>
+          <a:blip r:embed="rId4"/>
+          <a:stretch>
+            <a:fillRect/>
+          </a:stretch>
+        </p:blipFill>
+        <p:spPr>
+          <a:xfrm>
+            <a:off x="1682954" y="856135"/>
+            <a:ext cx="4417794" cy="2814716"/>
           </a:xfrm>
           <a:prstGeom prst="rect">
             <a:avLst/>
@@ -6218,7 +6311,7 @@
                 </a:solidFill>
                 <a:cs typeface="Times New Roman" panose="02020603050405020304" pitchFamily="18" charset="0"/>
               </a:rPr>
-              <a:t>2- تقسيم </a:t>
+              <a:t>2- </a:t>
             </a:r>
             <a:r>
               <a:rPr lang="ar-DZ" sz="4400" b="1" u="sng" dirty="0" smtClean="0">
@@ -6227,7 +6320,25 @@
                 </a:solidFill>
                 <a:cs typeface="Times New Roman" panose="02020603050405020304" pitchFamily="18" charset="0"/>
               </a:rPr>
-              <a:t>الخلايا : </a:t>
+              <a:t>التظليل</a:t>
+            </a:r>
+            <a:r>
+              <a:rPr lang="ar-DZ" sz="4400" b="1" u="sng" dirty="0" smtClean="0">
+                <a:solidFill>
+                  <a:srgbClr val="FF0000"/>
+                </a:solidFill>
+                <a:cs typeface="Times New Roman" panose="02020603050405020304" pitchFamily="18" charset="0"/>
+              </a:rPr>
+              <a:t> </a:t>
+            </a:r>
+            <a:r>
+              <a:rPr lang="ar-DZ" sz="4400" b="1" u="sng" dirty="0" smtClean="0">
+                <a:solidFill>
+                  <a:srgbClr val="FF0000"/>
+                </a:solidFill>
+                <a:cs typeface="Times New Roman" panose="02020603050405020304" pitchFamily="18" charset="0"/>
+              </a:rPr>
+              <a:t>: </a:t>
             </a:r>
             <a:endParaRPr lang="fr-FR" sz="4400" dirty="0"/>
           </a:p>
@@ -6242,7 +6353,7 @@
         <p:spPr>
           <a:xfrm>
             <a:off x="212412" y="1195408"/>
-            <a:ext cx="11655738" cy="4626908"/>
+            <a:ext cx="11655738" cy="3025444"/>
           </a:xfrm>
           <a:prstGeom prst="rect">
             <a:avLst/>
@@ -6253,32 +6364,6 @@
             <a:spAutoFit/>
           </a:bodyPr>
           <a:lstStyle/>
-          <a:p>
-            <a:pPr marL="165100" algn="r" rtl="1">
-              <a:lnSpc>
-                <a:spcPct val="115000"/>
-              </a:lnSpc>
-              <a:spcAft>
-                <a:spcPts val="1000"/>
-              </a:spcAft>
-            </a:pPr>
-            <a:r>
-              <a:rPr lang="ar-DZ" sz="3600" b="1" dirty="0">
-                <a:solidFill>
-                  <a:srgbClr val="000000"/>
-                </a:solidFill>
-                <a:latin typeface="Calibri" panose="020F0502020204030204" pitchFamily="34" charset="0"/>
-                <a:ea typeface="Times New Roman" panose="02020603050405020304" pitchFamily="18" charset="0"/>
-                <a:cs typeface="+mj-cs"/>
-              </a:rPr>
-              <a:t>يمكن تقسيم خلية واحدة إلى عدة خلايا، بإتباع ما يلي:</a:t>
-            </a:r>
-            <a:endParaRPr lang="fr-FR" sz="3600" b="1" dirty="0">
-              <a:latin typeface="Calibri" panose="020F0502020204030204" pitchFamily="34" charset="0"/>
-              <a:ea typeface="Times New Roman" panose="02020603050405020304" pitchFamily="18" charset="0"/>
-              <a:cs typeface="+mj-cs"/>
-            </a:endParaRPr>
-          </a:p>
           <a:p>
             <a:pPr marL="908050" indent="-742950" algn="r" rtl="1">
               <a:lnSpc>
@@ -6291,6 +6376,17 @@
               <a:buAutoNum type="arabicPeriod"/>
             </a:pPr>
             <a:r>
+              <a:rPr lang="ar-DZ" sz="3600" b="1" dirty="0" smtClean="0">
+                <a:solidFill>
+                  <a:srgbClr val="000000"/>
+                </a:solidFill>
+                <a:latin typeface="Calibri" panose="020F0502020204030204" pitchFamily="34" charset="0"/>
+                <a:ea typeface="Times New Roman" panose="02020603050405020304" pitchFamily="18" charset="0"/>
+                <a:cs typeface="+mj-cs"/>
+              </a:rPr>
+              <a:t>نحدد </a:t>
+            </a:r>
+            <a:r>
               <a:rPr lang="ar-DZ" sz="3600" b="1" dirty="0">
                 <a:solidFill>
                   <a:srgbClr val="000000"/>
@@ -6299,13 +6395,8 @@
                 <a:ea typeface="Times New Roman" panose="02020603050405020304" pitchFamily="18" charset="0"/>
                 <a:cs typeface="+mj-cs"/>
               </a:rPr>
-              <a:t>نحدد الخلية المراد تقسيمها</a:t>
-            </a:r>
-            <a:endParaRPr lang="fr-FR" sz="3600" b="1" dirty="0">
-              <a:latin typeface="Calibri" panose="020F0502020204030204" pitchFamily="34" charset="0"/>
-              <a:ea typeface="Times New Roman" panose="02020603050405020304" pitchFamily="18" charset="0"/>
-              <a:cs typeface="+mj-cs"/>
-            </a:endParaRPr>
+              <a:t>الخلايا المعنية</a:t>
+            </a:r>
           </a:p>
           <a:p>
             <a:pPr marL="908050" indent="-742950" algn="r" rtl="1">
@@ -6319,7 +6410,7 @@
               <a:buAutoNum type="arabicPeriod"/>
             </a:pPr>
             <a:r>
-              <a:rPr lang="ar-DZ" sz="3600" b="1" dirty="0">
+              <a:rPr lang="ar-DZ" sz="3600" b="1" dirty="0" smtClean="0">
                 <a:solidFill>
                   <a:srgbClr val="000000"/>
                 </a:solidFill>
@@ -6327,24 +6418,19 @@
                 <a:ea typeface="Times New Roman" panose="02020603050405020304" pitchFamily="18" charset="0"/>
                 <a:cs typeface="+mj-cs"/>
               </a:rPr>
-              <a:t>التبويب </a:t>
-            </a:r>
-            <a:r>
-              <a:rPr lang="fr-FR" sz="3600" b="1" dirty="0">
+              <a:t>تبويب التصميم </a:t>
+            </a:r>
+            <a:r>
+              <a:rPr lang="fr-FR" sz="3600" b="1" dirty="0" smtClean="0">
                 <a:solidFill>
                   <a:srgbClr val="000000"/>
                 </a:solidFill>
-                <a:latin typeface="Times New Roman" panose="02020603050405020304" pitchFamily="18" charset="0"/>
+                <a:latin typeface="Calibri" panose="020F0502020204030204" pitchFamily="34" charset="0"/>
                 <a:ea typeface="Times New Roman" panose="02020603050405020304" pitchFamily="18" charset="0"/>
                 <a:cs typeface="+mj-cs"/>
               </a:rPr>
-              <a:t>Disposition </a:t>
-            </a:r>
-            <a:endParaRPr lang="fr-FR" sz="3600" b="1" dirty="0">
-              <a:latin typeface="Calibri" panose="020F0502020204030204" pitchFamily="34" charset="0"/>
-              <a:ea typeface="Times New Roman" panose="02020603050405020304" pitchFamily="18" charset="0"/>
-              <a:cs typeface="+mj-cs"/>
-            </a:endParaRPr>
+              <a:t>Création</a:t>
+            </a:r>
           </a:p>
           <a:p>
             <a:pPr marL="908050" indent="-742950" algn="r" rtl="1">
@@ -6358,6 +6444,17 @@
               <a:buAutoNum type="arabicPeriod"/>
             </a:pPr>
             <a:r>
+              <a:rPr lang="ar-DZ" sz="3600" b="1" dirty="0" smtClean="0">
+                <a:solidFill>
+                  <a:srgbClr val="000000"/>
+                </a:solidFill>
+                <a:latin typeface="Calibri" panose="020F0502020204030204" pitchFamily="34" charset="0"/>
+                <a:ea typeface="Times New Roman" panose="02020603050405020304" pitchFamily="18" charset="0"/>
+                <a:cs typeface="+mj-cs"/>
+              </a:rPr>
+              <a:t>التعليمة </a:t>
+            </a:r>
+            <a:r>
               <a:rPr lang="ar-DZ" sz="3600" b="1" dirty="0">
                 <a:solidFill>
                   <a:srgbClr val="000000"/>
@@ -6366,27 +6463,41 @@
                 <a:ea typeface="Times New Roman" panose="02020603050405020304" pitchFamily="18" charset="0"/>
                 <a:cs typeface="+mj-cs"/>
               </a:rPr>
-              <a:t>التعليمة تقسيم الخلايا </a:t>
+              <a:t>تظليل </a:t>
+            </a:r>
+            <a:r>
+              <a:rPr lang="fr-FR" sz="3600" b="1" dirty="0" smtClean="0">
+                <a:solidFill>
+                  <a:srgbClr val="000000"/>
+                </a:solidFill>
+                <a:latin typeface="Calibri" panose="020F0502020204030204" pitchFamily="34" charset="0"/>
+                <a:ea typeface="Times New Roman" panose="02020603050405020304" pitchFamily="18" charset="0"/>
+                <a:cs typeface="+mj-cs"/>
+              </a:rPr>
+              <a:t>Trame </a:t>
             </a:r>
             <a:r>
               <a:rPr lang="fr-FR" sz="3600" b="1" dirty="0">
                 <a:solidFill>
                   <a:srgbClr val="000000"/>
                 </a:solidFill>
-                <a:latin typeface="Times New Roman" panose="02020603050405020304" pitchFamily="18" charset="0"/>
+                <a:latin typeface="Calibri" panose="020F0502020204030204" pitchFamily="34" charset="0"/>
                 <a:ea typeface="Times New Roman" panose="02020603050405020304" pitchFamily="18" charset="0"/>
                 <a:cs typeface="+mj-cs"/>
               </a:rPr>
-              <a:t>Fractionner </a:t>
-            </a:r>
-            <a:endParaRPr lang="fr-FR" sz="3600" b="1" dirty="0" smtClean="0">
-              <a:solidFill>
-                <a:srgbClr val="000000"/>
-              </a:solidFill>
-              <a:latin typeface="Times New Roman" panose="02020603050405020304" pitchFamily="18" charset="0"/>
-              <a:ea typeface="Times New Roman" panose="02020603050405020304" pitchFamily="18" charset="0"/>
-              <a:cs typeface="+mj-cs"/>
-            </a:endParaRPr>
+              <a:t>de </a:t>
+            </a:r>
+            <a:r>
+              <a:rPr lang="fr-FR" sz="3600" b="1" dirty="0" smtClean="0">
+                <a:solidFill>
+                  <a:srgbClr val="000000"/>
+                </a:solidFill>
+                <a:latin typeface="Calibri" panose="020F0502020204030204" pitchFamily="34" charset="0"/>
+                <a:ea typeface="Times New Roman" panose="02020603050405020304" pitchFamily="18" charset="0"/>
+                <a:cs typeface="+mj-cs"/>
+              </a:rPr>
+              <a:t>fond</a:t>
+            </a:r>
           </a:p>
           <a:p>
             <a:pPr marL="908050" indent="-742950" algn="r" rtl="1">
@@ -6400,6 +6511,17 @@
               <a:buAutoNum type="arabicPeriod"/>
             </a:pPr>
             <a:r>
+              <a:rPr lang="ar-DZ" sz="3600" b="1" dirty="0" smtClean="0">
+                <a:solidFill>
+                  <a:srgbClr val="000000"/>
+                </a:solidFill>
+                <a:latin typeface="Calibri" panose="020F0502020204030204" pitchFamily="34" charset="0"/>
+                <a:ea typeface="Times New Roman" panose="02020603050405020304" pitchFamily="18" charset="0"/>
+                <a:cs typeface="+mj-cs"/>
+              </a:rPr>
+              <a:t>نختار </a:t>
+            </a:r>
+            <a:r>
               <a:rPr lang="ar-DZ" sz="3600" b="1" dirty="0">
                 <a:solidFill>
                   <a:srgbClr val="000000"/>
@@ -6408,52 +6530,7 @@
                 <a:ea typeface="Times New Roman" panose="02020603050405020304" pitchFamily="18" charset="0"/>
                 <a:cs typeface="+mj-cs"/>
               </a:rPr>
-              <a:t>نكتب عدد الأعمدة والأسطر التي نريد الحصول </a:t>
-            </a:r>
-            <a:r>
-              <a:rPr lang="ar-DZ" sz="3600" b="1" dirty="0" smtClean="0">
-                <a:solidFill>
-                  <a:srgbClr val="000000"/>
-                </a:solidFill>
-                <a:latin typeface="Calibri" panose="020F0502020204030204" pitchFamily="34" charset="0"/>
-                <a:ea typeface="Times New Roman" panose="02020603050405020304" pitchFamily="18" charset="0"/>
-                <a:cs typeface="+mj-cs"/>
-              </a:rPr>
-              <a:t>عليها</a:t>
-            </a:r>
-          </a:p>
-          <a:p>
-            <a:pPr marL="908050" indent="-742950" algn="r" rtl="1">
-              <a:lnSpc>
-                <a:spcPct val="115000"/>
-              </a:lnSpc>
-              <a:spcAft>
-                <a:spcPts val="1000"/>
-              </a:spcAft>
-              <a:buFont typeface="+mj-lt"/>
-              <a:buAutoNum type="arabicPeriod"/>
-            </a:pPr>
-            <a:r>
-              <a:rPr lang="ar-DZ" sz="3600" b="1" dirty="0">
-                <a:solidFill>
-                  <a:srgbClr val="000000"/>
-                </a:solidFill>
-                <a:latin typeface="Calibri" panose="020F0502020204030204" pitchFamily="34" charset="0"/>
-                <a:ea typeface="Times New Roman" panose="02020603050405020304" pitchFamily="18" charset="0"/>
-                <a:cs typeface="+mj-cs"/>
-              </a:rPr>
-              <a:t>نضغط على </a:t>
-            </a:r>
-            <a:r>
-              <a:rPr lang="fr-FR" sz="3600" b="1" dirty="0" smtClean="0">
-                <a:solidFill>
-                  <a:srgbClr val="000000"/>
-                </a:solidFill>
-                <a:latin typeface="Times New Roman" panose="02020603050405020304" pitchFamily="18" charset="0"/>
-                <a:ea typeface="Times New Roman" panose="02020603050405020304" pitchFamily="18" charset="0"/>
-                <a:cs typeface="+mj-cs"/>
-              </a:rPr>
-              <a:t>OK</a:t>
+              <a:t>اللون الذي نريده.</a:t>
             </a:r>
             <a:endParaRPr lang="fr-FR" sz="3600" b="1" dirty="0">
               <a:latin typeface="Calibri" panose="020F0502020204030204" pitchFamily="34" charset="0"/>
@@ -6560,7 +6637,7 @@
         <p:spPr>
           <a:xfrm>
             <a:off x="0" y="1140081"/>
-            <a:ext cx="11859904" cy="1365182"/>
+            <a:ext cx="11859904" cy="1237903"/>
           </a:xfrm>
           <a:prstGeom prst="rect">
             <a:avLst/>
@@ -6572,22 +6649,65 @@
           </a:bodyPr>
           <a:lstStyle/>
           <a:p>
-            <a:pPr lvl="0" algn="r" rtl="1">
+            <a:pPr marL="571500" lvl="0" indent="-571500" algn="r" rtl="1">
               <a:lnSpc>
                 <a:spcPct val="107000"/>
               </a:lnSpc>
               <a:spcAft>
                 <a:spcPts val="0"/>
               </a:spcAft>
+              <a:buFont typeface="Wingdings" panose="05000000000000000000" pitchFamily="2" charset="2"/>
+              <a:buChar char="§"/>
             </a:pPr>
             <a:r>
-              <a:rPr lang="ar-DZ" sz="4000" b="1" dirty="0">
+              <a:rPr lang="ar-DZ" sz="3600" b="1" dirty="0" smtClean="0">
                 <a:latin typeface="Calibri" panose="020F0502020204030204" pitchFamily="34" charset="0"/>
                 <a:ea typeface="Calibri" panose="020F0502020204030204" pitchFamily="34" charset="0"/>
                 <a:cs typeface="Times New Roman" panose="02020603050405020304" pitchFamily="18" charset="0"/>
               </a:rPr>
-              <a:t>أنجز جدولك التوقيت الأسبوعي في ملف وورد واحفظه على سطح المكتب معطيا له اسم  لقبك_اسمك_جدول_توقيت_2م1</a:t>
-            </a:r>
+              <a:t>لنفتح </a:t>
+            </a:r>
+            <a:r>
+              <a:rPr lang="ar-DZ" sz="3600" b="1" dirty="0">
+                <a:latin typeface="Calibri" panose="020F0502020204030204" pitchFamily="34" charset="0"/>
+                <a:ea typeface="Calibri" panose="020F0502020204030204" pitchFamily="34" charset="0"/>
+                <a:cs typeface="Times New Roman" panose="02020603050405020304" pitchFamily="18" charset="0"/>
+              </a:rPr>
+              <a:t>"جدول التوقيت" الذي بدأته في الحصص الماضية</a:t>
+            </a:r>
+          </a:p>
+          <a:p>
+            <a:pPr marL="571500" lvl="0" indent="-571500" algn="r" rtl="1">
+              <a:lnSpc>
+                <a:spcPct val="107000"/>
+              </a:lnSpc>
+              <a:spcAft>
+                <a:spcPts val="0"/>
+              </a:spcAft>
+              <a:buFont typeface="Wingdings" panose="05000000000000000000" pitchFamily="2" charset="2"/>
+              <a:buChar char="§"/>
+            </a:pPr>
+            <a:r>
+              <a:rPr lang="ar-DZ" sz="3600" b="1" dirty="0" smtClean="0">
+                <a:latin typeface="Calibri" panose="020F0502020204030204" pitchFamily="34" charset="0"/>
+                <a:ea typeface="Calibri" panose="020F0502020204030204" pitchFamily="34" charset="0"/>
+                <a:cs typeface="Times New Roman" panose="02020603050405020304" pitchFamily="18" charset="0"/>
+              </a:rPr>
+              <a:t>قم </a:t>
+            </a:r>
+            <a:r>
+              <a:rPr lang="ar-DZ" sz="3600" b="1" dirty="0">
+                <a:latin typeface="Calibri" panose="020F0502020204030204" pitchFamily="34" charset="0"/>
+                <a:ea typeface="Calibri" panose="020F0502020204030204" pitchFamily="34" charset="0"/>
+                <a:cs typeface="Times New Roman" panose="02020603050405020304" pitchFamily="18" charset="0"/>
+              </a:rPr>
+              <a:t>بتنسيق حدوده و تظليل الخلايا المناسبة</a:t>
+            </a:r>
+            <a:endParaRPr lang="ar-DZ" sz="3600" b="1" dirty="0">
+              <a:latin typeface="Calibri" panose="020F0502020204030204" pitchFamily="34" charset="0"/>
+              <a:ea typeface="Calibri" panose="020F0502020204030204" pitchFamily="34" charset="0"/>
+              <a:cs typeface="Times New Roman" panose="02020603050405020304" pitchFamily="18" charset="0"/>
+            </a:endParaRPr>
           </a:p>
         </p:txBody>
       </p:sp>
@@ -6613,7 +6733,7 @@
         </p:blipFill>
         <p:spPr>
           <a:xfrm>
-            <a:off x="2876482" y="2752913"/>
+            <a:off x="2982499" y="2718400"/>
             <a:ext cx="6506058" cy="3754874"/>
           </a:xfrm>
           <a:prstGeom prst="rect">
